--- a/Sessions/10/communication final.pptx
+++ b/Sessions/10/communication final.pptx
@@ -3404,7 +3404,7 @@
           <a:p>
             <a:fld id="{5310F177-2B9D-42C7-87F0-306C299C9BFE}" type="datetimeFigureOut">
               <a:rPr lang="en-US" smtClean="0"/>
-              <a:t>2/27/2026</a:t>
+              <a:t>3/3/2026</a:t>
             </a:fld>
             <a:endParaRPr lang="en-US"/>
           </a:p>
@@ -7259,7 +7259,7 @@
           <a:p>
             <a:fld id="{EB86029A-0DB0-4EA6-8941-FEFA542D9F90}" type="datetimeFigureOut">
               <a:rPr lang="en-US" smtClean="0"/>
-              <a:t>2/27/2026</a:t>
+              <a:t>3/3/2026</a:t>
             </a:fld>
             <a:endParaRPr lang="en-US"/>
           </a:p>
@@ -7457,7 +7457,7 @@
           <a:p>
             <a:fld id="{EB86029A-0DB0-4EA6-8941-FEFA542D9F90}" type="datetimeFigureOut">
               <a:rPr lang="en-US" smtClean="0"/>
-              <a:t>2/27/2026</a:t>
+              <a:t>3/3/2026</a:t>
             </a:fld>
             <a:endParaRPr lang="en-US"/>
           </a:p>
@@ -7665,7 +7665,7 @@
           <a:p>
             <a:fld id="{EB86029A-0DB0-4EA6-8941-FEFA542D9F90}" type="datetimeFigureOut">
               <a:rPr lang="en-US" smtClean="0"/>
-              <a:t>2/27/2026</a:t>
+              <a:t>3/3/2026</a:t>
             </a:fld>
             <a:endParaRPr lang="en-US"/>
           </a:p>
@@ -7863,7 +7863,7 @@
           <a:p>
             <a:fld id="{EB86029A-0DB0-4EA6-8941-FEFA542D9F90}" type="datetimeFigureOut">
               <a:rPr lang="en-US" smtClean="0"/>
-              <a:t>2/27/2026</a:t>
+              <a:t>3/3/2026</a:t>
             </a:fld>
             <a:endParaRPr lang="en-US"/>
           </a:p>
@@ -8138,7 +8138,7 @@
           <a:p>
             <a:fld id="{EB86029A-0DB0-4EA6-8941-FEFA542D9F90}" type="datetimeFigureOut">
               <a:rPr lang="en-US" smtClean="0"/>
-              <a:t>2/27/2026</a:t>
+              <a:t>3/3/2026</a:t>
             </a:fld>
             <a:endParaRPr lang="en-US"/>
           </a:p>
@@ -8403,7 +8403,7 @@
           <a:p>
             <a:fld id="{EB86029A-0DB0-4EA6-8941-FEFA542D9F90}" type="datetimeFigureOut">
               <a:rPr lang="en-US" smtClean="0"/>
-              <a:t>2/27/2026</a:t>
+              <a:t>3/3/2026</a:t>
             </a:fld>
             <a:endParaRPr lang="en-US"/>
           </a:p>
@@ -8815,7 +8815,7 @@
           <a:p>
             <a:fld id="{EB86029A-0DB0-4EA6-8941-FEFA542D9F90}" type="datetimeFigureOut">
               <a:rPr lang="en-US" smtClean="0"/>
-              <a:t>2/27/2026</a:t>
+              <a:t>3/3/2026</a:t>
             </a:fld>
             <a:endParaRPr lang="en-US"/>
           </a:p>
@@ -8956,7 +8956,7 @@
           <a:p>
             <a:fld id="{EB86029A-0DB0-4EA6-8941-FEFA542D9F90}" type="datetimeFigureOut">
               <a:rPr lang="en-US" smtClean="0"/>
-              <a:t>2/27/2026</a:t>
+              <a:t>3/3/2026</a:t>
             </a:fld>
             <a:endParaRPr lang="en-US"/>
           </a:p>
@@ -9069,7 +9069,7 @@
           <a:p>
             <a:fld id="{EB86029A-0DB0-4EA6-8941-FEFA542D9F90}" type="datetimeFigureOut">
               <a:rPr lang="en-US" smtClean="0"/>
-              <a:t>2/27/2026</a:t>
+              <a:t>3/3/2026</a:t>
             </a:fld>
             <a:endParaRPr lang="en-US"/>
           </a:p>
@@ -9380,7 +9380,7 @@
           <a:p>
             <a:fld id="{EB86029A-0DB0-4EA6-8941-FEFA542D9F90}" type="datetimeFigureOut">
               <a:rPr lang="en-US" smtClean="0"/>
-              <a:t>2/27/2026</a:t>
+              <a:t>3/3/2026</a:t>
             </a:fld>
             <a:endParaRPr lang="en-US"/>
           </a:p>
@@ -9668,7 +9668,7 @@
           <a:p>
             <a:fld id="{EB86029A-0DB0-4EA6-8941-FEFA542D9F90}" type="datetimeFigureOut">
               <a:rPr lang="en-US" smtClean="0"/>
-              <a:t>2/27/2026</a:t>
+              <a:t>3/3/2026</a:t>
             </a:fld>
             <a:endParaRPr lang="en-US"/>
           </a:p>
@@ -9909,7 +9909,7 @@
           <a:p>
             <a:fld id="{EB86029A-0DB0-4EA6-8941-FEFA542D9F90}" type="datetimeFigureOut">
               <a:rPr lang="en-US" smtClean="0"/>
-              <a:t>2/27/2026</a:t>
+              <a:t>3/3/2026</a:t>
             </a:fld>
             <a:endParaRPr lang="en-US"/>
           </a:p>
@@ -14582,8 +14582,8 @@
           </a:p>
         </p:txBody>
       </p:sp>
-      <mc:AlternateContent xmlns:mc="http://schemas.openxmlformats.org/markup-compatibility/2006">
-        <mc:Choice xmlns:a14="http://schemas.microsoft.com/office/drawing/2010/main" Requires="a14">
+      <mc:AlternateContent xmlns:mc="http://schemas.openxmlformats.org/markup-compatibility/2006" xmlns:a14="http://schemas.microsoft.com/office/drawing/2010/main">
+        <mc:Choice Requires="a14">
           <p:sp>
             <p:nvSpPr>
               <p:cNvPr id="15" name="Content Placeholder 2">
@@ -14730,7 +14730,7 @@
             </p:txBody>
           </p:sp>
         </mc:Choice>
-        <mc:Fallback>
+        <mc:Fallback xmlns="">
           <p:sp>
             <p:nvSpPr>
               <p:cNvPr id="15" name="Content Placeholder 2">
@@ -27919,114 +27919,6 @@
               <a:t>Cairo University, EECE Department.</a:t>
             </a:r>
             <a:endParaRPr dirty="0"/>
-          </a:p>
-        </p:txBody>
-      </p:sp>
-      <p:sp>
-        <p:nvSpPr>
-          <p:cNvPr id="126" name="Google Shape;126;p2"/>
-          <p:cNvSpPr txBox="1"/>
-          <p:nvPr/>
-        </p:nvSpPr>
-        <p:spPr>
-          <a:xfrm>
-            <a:off x="3510280" y="3747055"/>
-            <a:ext cx="5173936" cy="461624"/>
-          </a:xfrm>
-          <a:prstGeom prst="rect">
-            <a:avLst/>
-          </a:prstGeom>
-          <a:noFill/>
-          <a:ln>
-            <a:noFill/>
-          </a:ln>
-        </p:spPr>
-        <p:txBody>
-          <a:bodyPr spcFirstLastPara="1" wrap="square" lIns="91425" tIns="45700" rIns="91425" bIns="45700" anchor="t" anchorCtr="0">
-            <a:spAutoFit/>
-          </a:bodyPr>
-          <a:lstStyle/>
-          <a:p>
-            <a:pPr marL="0" marR="0" lvl="0" indent="0" algn="l" rtl="0">
-              <a:spcBef>
-                <a:spcPts val="0"/>
-              </a:spcBef>
-              <a:spcAft>
-                <a:spcPts val="0"/>
-              </a:spcAft>
-              <a:buNone/>
-            </a:pPr>
-            <a:r>
-              <a:rPr lang="en-US" sz="2400" dirty="0">
-                <a:solidFill>
-                  <a:srgbClr val="FFFFFF"/>
-                </a:solidFill>
-                <a:latin typeface="Arial"/>
-                <a:ea typeface="Arial"/>
-                <a:cs typeface="Arial"/>
-                <a:sym typeface="Arial"/>
-              </a:rPr>
-              <a:t>Contact me: youefkh05@gmail.com </a:t>
-            </a:r>
-            <a:endParaRPr sz="2400" b="1" dirty="0">
-              <a:solidFill>
-                <a:srgbClr val="FFFFFF"/>
-              </a:solidFill>
-              <a:latin typeface="Arial"/>
-              <a:ea typeface="Arial"/>
-              <a:cs typeface="Arial"/>
-              <a:sym typeface="Arial"/>
-            </a:endParaRPr>
-          </a:p>
-        </p:txBody>
-      </p:sp>
-      <p:sp>
-        <p:nvSpPr>
-          <p:cNvPr id="127" name="Google Shape;127;p2"/>
-          <p:cNvSpPr txBox="1"/>
-          <p:nvPr/>
-        </p:nvSpPr>
-        <p:spPr>
-          <a:xfrm>
-            <a:off x="3657600" y="4363844"/>
-            <a:ext cx="4872726" cy="461624"/>
-          </a:xfrm>
-          <a:prstGeom prst="rect">
-            <a:avLst/>
-          </a:prstGeom>
-          <a:noFill/>
-          <a:ln>
-            <a:noFill/>
-          </a:ln>
-        </p:spPr>
-        <p:txBody>
-          <a:bodyPr spcFirstLastPara="1" wrap="square" lIns="91425" tIns="45700" rIns="91425" bIns="45700" anchor="t" anchorCtr="0">
-            <a:spAutoFit/>
-          </a:bodyPr>
-          <a:lstStyle/>
-          <a:p>
-            <a:pPr lvl="0"/>
-            <a:r>
-              <a:rPr lang="en-US" sz="2400" dirty="0">
-                <a:solidFill>
-                  <a:srgbClr val="FFFFFF"/>
-                </a:solidFill>
-                <a:latin typeface="Arial"/>
-                <a:ea typeface="Arial"/>
-                <a:cs typeface="Arial"/>
-                <a:sym typeface="Arial"/>
-              </a:rPr>
-              <a:t>LinkedIn: https://shorturl.at/hgsIP</a:t>
-            </a:r>
-            <a:endParaRPr sz="2400" b="1" dirty="0">
-              <a:solidFill>
-                <a:srgbClr val="FFFFFF"/>
-              </a:solidFill>
-              <a:latin typeface="Arial"/>
-              <a:ea typeface="Arial"/>
-              <a:cs typeface="Arial"/>
-              <a:sym typeface="Arial"/>
-            </a:endParaRPr>
           </a:p>
         </p:txBody>
       </p:sp>
